--- a/Form Trace/ゲーム企画Ⅱ四月の企画.pptx
+++ b/Form Trace/ゲーム企画Ⅱ四月の企画.pptx
@@ -267,7 +267,7 @@
           <a:p>
             <a:fld id="{4FBC00AD-3416-448C-A57A-8EBA5F80DBCE}" type="datetimeFigureOut">
               <a:rPr kumimoji="1" lang="ja-JP" altLang="en-US" smtClean="0"/>
-              <a:t>2026/5/28</a:t>
+              <a:t>2026/10/1</a:t>
             </a:fld>
             <a:endParaRPr kumimoji="1" lang="ja-JP" altLang="en-US"/>
           </a:p>
@@ -497,7 +497,7 @@
           <a:p>
             <a:fld id="{4FBC00AD-3416-448C-A57A-8EBA5F80DBCE}" type="datetimeFigureOut">
               <a:rPr kumimoji="1" lang="ja-JP" altLang="en-US" smtClean="0"/>
-              <a:t>2026/5/28</a:t>
+              <a:t>2026/10/1</a:t>
             </a:fld>
             <a:endParaRPr kumimoji="1" lang="ja-JP" altLang="en-US"/>
           </a:p>
@@ -737,7 +737,7 @@
           <a:p>
             <a:fld id="{4FBC00AD-3416-448C-A57A-8EBA5F80DBCE}" type="datetimeFigureOut">
               <a:rPr kumimoji="1" lang="ja-JP" altLang="en-US" smtClean="0"/>
-              <a:t>2026/5/28</a:t>
+              <a:t>2026/10/1</a:t>
             </a:fld>
             <a:endParaRPr kumimoji="1" lang="ja-JP" altLang="en-US"/>
           </a:p>
@@ -967,7 +967,7 @@
           <a:p>
             <a:fld id="{4FBC00AD-3416-448C-A57A-8EBA5F80DBCE}" type="datetimeFigureOut">
               <a:rPr kumimoji="1" lang="ja-JP" altLang="en-US" smtClean="0"/>
-              <a:t>2026/5/28</a:t>
+              <a:t>2026/10/1</a:t>
             </a:fld>
             <a:endParaRPr kumimoji="1" lang="ja-JP" altLang="en-US"/>
           </a:p>
@@ -1242,7 +1242,7 @@
           <a:p>
             <a:fld id="{4FBC00AD-3416-448C-A57A-8EBA5F80DBCE}" type="datetimeFigureOut">
               <a:rPr kumimoji="1" lang="ja-JP" altLang="en-US" smtClean="0"/>
-              <a:t>2026/5/28</a:t>
+              <a:t>2026/10/1</a:t>
             </a:fld>
             <a:endParaRPr kumimoji="1" lang="ja-JP" altLang="en-US"/>
           </a:p>
@@ -1571,7 +1571,7 @@
           <a:p>
             <a:fld id="{4FBC00AD-3416-448C-A57A-8EBA5F80DBCE}" type="datetimeFigureOut">
               <a:rPr kumimoji="1" lang="ja-JP" altLang="en-US" smtClean="0"/>
-              <a:t>2026/5/28</a:t>
+              <a:t>2026/10/1</a:t>
             </a:fld>
             <a:endParaRPr kumimoji="1" lang="ja-JP" altLang="en-US"/>
           </a:p>
@@ -2047,7 +2047,7 @@
           <a:p>
             <a:fld id="{4FBC00AD-3416-448C-A57A-8EBA5F80DBCE}" type="datetimeFigureOut">
               <a:rPr kumimoji="1" lang="ja-JP" altLang="en-US" smtClean="0"/>
-              <a:t>2026/5/28</a:t>
+              <a:t>2026/10/1</a:t>
             </a:fld>
             <a:endParaRPr kumimoji="1" lang="ja-JP" altLang="en-US"/>
           </a:p>
@@ -2188,7 +2188,7 @@
           <a:p>
             <a:fld id="{4FBC00AD-3416-448C-A57A-8EBA5F80DBCE}" type="datetimeFigureOut">
               <a:rPr kumimoji="1" lang="ja-JP" altLang="en-US" smtClean="0"/>
-              <a:t>2026/5/28</a:t>
+              <a:t>2026/10/1</a:t>
             </a:fld>
             <a:endParaRPr kumimoji="1" lang="ja-JP" altLang="en-US"/>
           </a:p>
@@ -2301,7 +2301,7 @@
           <a:p>
             <a:fld id="{4FBC00AD-3416-448C-A57A-8EBA5F80DBCE}" type="datetimeFigureOut">
               <a:rPr kumimoji="1" lang="ja-JP" altLang="en-US" smtClean="0"/>
-              <a:t>2026/5/28</a:t>
+              <a:t>2026/10/1</a:t>
             </a:fld>
             <a:endParaRPr kumimoji="1" lang="ja-JP" altLang="en-US"/>
           </a:p>
@@ -2644,7 +2644,7 @@
           <a:p>
             <a:fld id="{4FBC00AD-3416-448C-A57A-8EBA5F80DBCE}" type="datetimeFigureOut">
               <a:rPr kumimoji="1" lang="ja-JP" altLang="en-US" smtClean="0"/>
-              <a:t>2026/5/28</a:t>
+              <a:t>2026/10/1</a:t>
             </a:fld>
             <a:endParaRPr kumimoji="1" lang="ja-JP" altLang="en-US"/>
           </a:p>
@@ -2932,7 +2932,7 @@
           <a:p>
             <a:fld id="{4FBC00AD-3416-448C-A57A-8EBA5F80DBCE}" type="datetimeFigureOut">
               <a:rPr kumimoji="1" lang="ja-JP" altLang="en-US" smtClean="0"/>
-              <a:t>2026/5/28</a:t>
+              <a:t>2026/10/1</a:t>
             </a:fld>
             <a:endParaRPr kumimoji="1" lang="ja-JP" altLang="en-US"/>
           </a:p>
@@ -3205,7 +3205,7 @@
           <a:p>
             <a:fld id="{4FBC00AD-3416-448C-A57A-8EBA5F80DBCE}" type="datetimeFigureOut">
               <a:rPr kumimoji="1" lang="ja-JP" altLang="en-US" smtClean="0"/>
-              <a:t>2026/5/28</a:t>
+              <a:t>2026/10/1</a:t>
             </a:fld>
             <a:endParaRPr kumimoji="1" lang="ja-JP" altLang="en-US"/>
           </a:p>
@@ -6221,7 +6221,7 @@
         <p:spPr>
           <a:xfrm>
             <a:off x="6245629" y="1418093"/>
-            <a:ext cx="5519651" cy="830997"/>
+            <a:ext cx="5519651" cy="1569660"/>
           </a:xfrm>
           <a:prstGeom prst="rect">
             <a:avLst/>
@@ -6253,6 +6253,14 @@
               <a:rPr kumimoji="1" lang="ja-JP" altLang="en-US" sz="2400" dirty="0"/>
               <a:t>生きていること</a:t>
             </a:r>
+            <a:endParaRPr kumimoji="1" lang="en-US" altLang="ja-JP" sz="2400" dirty="0"/>
+          </a:p>
+          <a:p>
+            <a:r>
+              <a:rPr lang="ja-JP" altLang="en-US" sz="2400" dirty="0"/>
+              <a:t>　　　（マーキングしたら自由に変身可可能）</a:t>
+            </a:r>
+            <a:endParaRPr kumimoji="1" lang="ja-JP" altLang="en-US" sz="2400" dirty="0"/>
           </a:p>
         </p:txBody>
       </p:sp>
